--- a/src/figure/2_frame.pptx
+++ b/src/figure/2_frame.pptx
@@ -107,6 +107,11 @@
       </a:defRPr>
     </a:lvl9pPr>
   </p:defaultTextStyle>
+  <p:extLst>
+    <p:ext uri="{EFAFB233-063F-42B5-8137-9DF3F51BA10A}">
+      <p15:sldGuideLst xmlns:p15="http://schemas.microsoft.com/office/powerpoint/2012/main"/>
+    </p:ext>
+  </p:extLst>
 </p:presentation>
 </file>
 
@@ -192,7 +197,7 @@
           <a:p>
             <a:fld id="{264CD236-0F4A-684A-96D0-0959E2A3AD79}" type="datetimeFigureOut">
               <a:rPr kumimoji="1" lang="zh-CN" altLang="en-US" smtClean="0"/>
-              <a:t>2026/5/7</a:t>
+              <a:t>2026/5/11</a:t>
             </a:fld>
             <a:endParaRPr kumimoji="1" lang="zh-CN" altLang="en-US"/>
           </a:p>
@@ -690,7 +695,7 @@
           <a:p>
             <a:fld id="{E9416F1D-6922-DB43-A349-0B07919EF5E2}" type="datetimeFigureOut">
               <a:rPr kumimoji="1" lang="zh-CN" altLang="en-US" smtClean="0"/>
-              <a:t>2026/5/7</a:t>
+              <a:t>2026/5/11</a:t>
             </a:fld>
             <a:endParaRPr kumimoji="1" lang="zh-CN" altLang="en-US"/>
           </a:p>
@@ -888,7 +893,7 @@
           <a:p>
             <a:fld id="{E9416F1D-6922-DB43-A349-0B07919EF5E2}" type="datetimeFigureOut">
               <a:rPr kumimoji="1" lang="zh-CN" altLang="en-US" smtClean="0"/>
-              <a:t>2026/5/7</a:t>
+              <a:t>2026/5/11</a:t>
             </a:fld>
             <a:endParaRPr kumimoji="1" lang="zh-CN" altLang="en-US"/>
           </a:p>
@@ -1096,7 +1101,7 @@
           <a:p>
             <a:fld id="{E9416F1D-6922-DB43-A349-0B07919EF5E2}" type="datetimeFigureOut">
               <a:rPr kumimoji="1" lang="zh-CN" altLang="en-US" smtClean="0"/>
-              <a:t>2026/5/7</a:t>
+              <a:t>2026/5/11</a:t>
             </a:fld>
             <a:endParaRPr kumimoji="1" lang="zh-CN" altLang="en-US"/>
           </a:p>
@@ -1294,7 +1299,7 @@
           <a:p>
             <a:fld id="{E9416F1D-6922-DB43-A349-0B07919EF5E2}" type="datetimeFigureOut">
               <a:rPr kumimoji="1" lang="zh-CN" altLang="en-US" smtClean="0"/>
-              <a:t>2026/5/7</a:t>
+              <a:t>2026/5/11</a:t>
             </a:fld>
             <a:endParaRPr kumimoji="1" lang="zh-CN" altLang="en-US"/>
           </a:p>
@@ -1569,7 +1574,7 @@
           <a:p>
             <a:fld id="{E9416F1D-6922-DB43-A349-0B07919EF5E2}" type="datetimeFigureOut">
               <a:rPr kumimoji="1" lang="zh-CN" altLang="en-US" smtClean="0"/>
-              <a:t>2026/5/7</a:t>
+              <a:t>2026/5/11</a:t>
             </a:fld>
             <a:endParaRPr kumimoji="1" lang="zh-CN" altLang="en-US"/>
           </a:p>
@@ -1834,7 +1839,7 @@
           <a:p>
             <a:fld id="{E9416F1D-6922-DB43-A349-0B07919EF5E2}" type="datetimeFigureOut">
               <a:rPr kumimoji="1" lang="zh-CN" altLang="en-US" smtClean="0"/>
-              <a:t>2026/5/7</a:t>
+              <a:t>2026/5/11</a:t>
             </a:fld>
             <a:endParaRPr kumimoji="1" lang="zh-CN" altLang="en-US"/>
           </a:p>
@@ -2246,7 +2251,7 @@
           <a:p>
             <a:fld id="{E9416F1D-6922-DB43-A349-0B07919EF5E2}" type="datetimeFigureOut">
               <a:rPr kumimoji="1" lang="zh-CN" altLang="en-US" smtClean="0"/>
-              <a:t>2026/5/7</a:t>
+              <a:t>2026/5/11</a:t>
             </a:fld>
             <a:endParaRPr kumimoji="1" lang="zh-CN" altLang="en-US"/>
           </a:p>
@@ -2387,7 +2392,7 @@
           <a:p>
             <a:fld id="{E9416F1D-6922-DB43-A349-0B07919EF5E2}" type="datetimeFigureOut">
               <a:rPr kumimoji="1" lang="zh-CN" altLang="en-US" smtClean="0"/>
-              <a:t>2026/5/7</a:t>
+              <a:t>2026/5/11</a:t>
             </a:fld>
             <a:endParaRPr kumimoji="1" lang="zh-CN" altLang="en-US"/>
           </a:p>
@@ -2500,7 +2505,7 @@
           <a:p>
             <a:fld id="{E9416F1D-6922-DB43-A349-0B07919EF5E2}" type="datetimeFigureOut">
               <a:rPr kumimoji="1" lang="zh-CN" altLang="en-US" smtClean="0"/>
-              <a:t>2026/5/7</a:t>
+              <a:t>2026/5/11</a:t>
             </a:fld>
             <a:endParaRPr kumimoji="1" lang="zh-CN" altLang="en-US"/>
           </a:p>
@@ -2811,7 +2816,7 @@
           <a:p>
             <a:fld id="{E9416F1D-6922-DB43-A349-0B07919EF5E2}" type="datetimeFigureOut">
               <a:rPr kumimoji="1" lang="zh-CN" altLang="en-US" smtClean="0"/>
-              <a:t>2026/5/7</a:t>
+              <a:t>2026/5/11</a:t>
             </a:fld>
             <a:endParaRPr kumimoji="1" lang="zh-CN" altLang="en-US"/>
           </a:p>
@@ -3099,7 +3104,7 @@
           <a:p>
             <a:fld id="{E9416F1D-6922-DB43-A349-0B07919EF5E2}" type="datetimeFigureOut">
               <a:rPr kumimoji="1" lang="zh-CN" altLang="en-US" smtClean="0"/>
-              <a:t>2026/5/7</a:t>
+              <a:t>2026/5/11</a:t>
             </a:fld>
             <a:endParaRPr kumimoji="1" lang="zh-CN" altLang="en-US"/>
           </a:p>
@@ -3340,7 +3345,7 @@
           <a:p>
             <a:fld id="{E9416F1D-6922-DB43-A349-0B07919EF5E2}" type="datetimeFigureOut">
               <a:rPr kumimoji="1" lang="zh-CN" altLang="en-US" smtClean="0"/>
-              <a:t>2026/5/7</a:t>
+              <a:t>2026/5/11</a:t>
             </a:fld>
             <a:endParaRPr kumimoji="1" lang="zh-CN" altLang="en-US"/>
           </a:p>
@@ -4142,8 +4147,8 @@
           </a:p>
         </p:txBody>
       </p:sp>
-      <mc:AlternateContent xmlns:mc="http://schemas.openxmlformats.org/markup-compatibility/2006">
-        <mc:Choice xmlns:a14="http://schemas.microsoft.com/office/drawing/2010/main" Requires="a14">
+      <mc:AlternateContent xmlns:mc="http://schemas.openxmlformats.org/markup-compatibility/2006" xmlns:a14="http://schemas.microsoft.com/office/drawing/2010/main">
+        <mc:Choice Requires="a14">
           <p:sp>
             <p:nvSpPr>
               <p:cNvPr id="10" name="文本框 9">
@@ -4219,7 +4224,7 @@
             </p:txBody>
           </p:sp>
         </mc:Choice>
-        <mc:Fallback>
+        <mc:Fallback xmlns="">
           <p:sp>
             <p:nvSpPr>
               <p:cNvPr id="10" name="文本框 9">
@@ -4264,8 +4269,8 @@
           </p:sp>
         </mc:Fallback>
       </mc:AlternateContent>
-      <mc:AlternateContent xmlns:mc="http://schemas.openxmlformats.org/markup-compatibility/2006">
-        <mc:Choice xmlns:a14="http://schemas.microsoft.com/office/drawing/2010/main" Requires="a14">
+      <mc:AlternateContent xmlns:mc="http://schemas.openxmlformats.org/markup-compatibility/2006" xmlns:a14="http://schemas.microsoft.com/office/drawing/2010/main">
+        <mc:Choice Requires="a14">
           <p:sp>
             <p:nvSpPr>
               <p:cNvPr id="11" name="文本框 10">
@@ -4473,7 +4478,7 @@
             </p:txBody>
           </p:sp>
         </mc:Choice>
-        <mc:Fallback>
+        <mc:Fallback xmlns="">
           <p:sp>
             <p:nvSpPr>
               <p:cNvPr id="11" name="文本框 10">
@@ -4628,8 +4633,8 @@
           </a:p>
         </p:txBody>
       </p:sp>
-      <mc:AlternateContent xmlns:mc="http://schemas.openxmlformats.org/markup-compatibility/2006">
-        <mc:Choice xmlns:a14="http://schemas.microsoft.com/office/drawing/2010/main" Requires="a14">
+      <mc:AlternateContent xmlns:mc="http://schemas.openxmlformats.org/markup-compatibility/2006" xmlns:a14="http://schemas.microsoft.com/office/drawing/2010/main">
+        <mc:Choice Requires="a14">
           <p:sp>
             <p:nvSpPr>
               <p:cNvPr id="15" name="文本框 14">
@@ -4705,7 +4710,7 @@
             </p:txBody>
           </p:sp>
         </mc:Choice>
-        <mc:Fallback>
+        <mc:Fallback xmlns="">
           <p:sp>
             <p:nvSpPr>
               <p:cNvPr id="15" name="文本框 14">
@@ -4750,8 +4755,8 @@
           </p:sp>
         </mc:Fallback>
       </mc:AlternateContent>
-      <mc:AlternateContent xmlns:mc="http://schemas.openxmlformats.org/markup-compatibility/2006">
-        <mc:Choice xmlns:a14="http://schemas.microsoft.com/office/drawing/2010/main" Requires="a14">
+      <mc:AlternateContent xmlns:mc="http://schemas.openxmlformats.org/markup-compatibility/2006" xmlns:a14="http://schemas.microsoft.com/office/drawing/2010/main">
+        <mc:Choice Requires="a14">
           <p:sp>
             <p:nvSpPr>
               <p:cNvPr id="17" name="文本框 16">
@@ -4980,7 +4985,7 @@
             </p:txBody>
           </p:sp>
         </mc:Choice>
-        <mc:Fallback>
+        <mc:Fallback xmlns="">
           <p:sp>
             <p:nvSpPr>
               <p:cNvPr id="17" name="文本框 16">
@@ -5287,8 +5292,8 @@
           </a:p>
         </p:txBody>
       </p:sp>
-      <mc:AlternateContent xmlns:mc="http://schemas.openxmlformats.org/markup-compatibility/2006">
-        <mc:Choice xmlns:a14="http://schemas.microsoft.com/office/drawing/2010/main" Requires="a14">
+      <mc:AlternateContent xmlns:mc="http://schemas.openxmlformats.org/markup-compatibility/2006" xmlns:a14="http://schemas.microsoft.com/office/drawing/2010/main">
+        <mc:Choice Requires="a14">
           <p:sp>
             <p:nvSpPr>
               <p:cNvPr id="28" name="文本框 27">
@@ -5349,7 +5354,7 @@
             </p:txBody>
           </p:sp>
         </mc:Choice>
-        <mc:Fallback>
+        <mc:Fallback xmlns="">
           <p:sp>
             <p:nvSpPr>
               <p:cNvPr id="28" name="文本框 27">
@@ -5394,8 +5399,8 @@
           </p:sp>
         </mc:Fallback>
       </mc:AlternateContent>
-      <mc:AlternateContent xmlns:mc="http://schemas.openxmlformats.org/markup-compatibility/2006">
-        <mc:Choice xmlns:a14="http://schemas.microsoft.com/office/drawing/2010/main" Requires="a14">
+      <mc:AlternateContent xmlns:mc="http://schemas.openxmlformats.org/markup-compatibility/2006" xmlns:a14="http://schemas.microsoft.com/office/drawing/2010/main">
+        <mc:Choice Requires="a14">
           <p:sp>
             <p:nvSpPr>
               <p:cNvPr id="29" name="文本框 28">
@@ -5456,7 +5461,7 @@
             </p:txBody>
           </p:sp>
         </mc:Choice>
-        <mc:Fallback>
+        <mc:Fallback xmlns="">
           <p:sp>
             <p:nvSpPr>
               <p:cNvPr id="29" name="文本框 28">
@@ -5501,8 +5506,8 @@
           </p:sp>
         </mc:Fallback>
       </mc:AlternateContent>
-      <mc:AlternateContent xmlns:mc="http://schemas.openxmlformats.org/markup-compatibility/2006">
-        <mc:Choice xmlns:a14="http://schemas.microsoft.com/office/drawing/2010/main" Requires="a14">
+      <mc:AlternateContent xmlns:mc="http://schemas.openxmlformats.org/markup-compatibility/2006" xmlns:a14="http://schemas.microsoft.com/office/drawing/2010/main">
+        <mc:Choice Requires="a14">
           <p:sp>
             <p:nvSpPr>
               <p:cNvPr id="30" name="文本框 29">
@@ -5570,7 +5575,7 @@
             </p:txBody>
           </p:sp>
         </mc:Choice>
-        <mc:Fallback>
+        <mc:Fallback xmlns="">
           <p:sp>
             <p:nvSpPr>
               <p:cNvPr id="30" name="文本框 29">
@@ -5615,8 +5620,8 @@
           </p:sp>
         </mc:Fallback>
       </mc:AlternateContent>
-      <mc:AlternateContent xmlns:mc="http://schemas.openxmlformats.org/markup-compatibility/2006">
-        <mc:Choice xmlns:a14="http://schemas.microsoft.com/office/drawing/2010/main" Requires="a14">
+      <mc:AlternateContent xmlns:mc="http://schemas.openxmlformats.org/markup-compatibility/2006" xmlns:a14="http://schemas.microsoft.com/office/drawing/2010/main">
+        <mc:Choice Requires="a14">
           <p:sp>
             <p:nvSpPr>
               <p:cNvPr id="31" name="文本框 30">
@@ -5691,7 +5696,7 @@
             </p:txBody>
           </p:sp>
         </mc:Choice>
-        <mc:Fallback>
+        <mc:Fallback xmlns="">
           <p:sp>
             <p:nvSpPr>
               <p:cNvPr id="31" name="文本框 30">
@@ -5736,8 +5741,8 @@
           </p:sp>
         </mc:Fallback>
       </mc:AlternateContent>
-      <mc:AlternateContent xmlns:mc="http://schemas.openxmlformats.org/markup-compatibility/2006">
-        <mc:Choice xmlns:a14="http://schemas.microsoft.com/office/drawing/2010/main" Requires="a14">
+      <mc:AlternateContent xmlns:mc="http://schemas.openxmlformats.org/markup-compatibility/2006" xmlns:a14="http://schemas.microsoft.com/office/drawing/2010/main">
+        <mc:Choice Requires="a14">
           <p:sp>
             <p:nvSpPr>
               <p:cNvPr id="32" name="文本框 31">
@@ -5805,7 +5810,7 @@
             </p:txBody>
           </p:sp>
         </mc:Choice>
-        <mc:Fallback>
+        <mc:Fallback xmlns="">
           <p:sp>
             <p:nvSpPr>
               <p:cNvPr id="32" name="文本框 31">
@@ -5850,8 +5855,8 @@
           </p:sp>
         </mc:Fallback>
       </mc:AlternateContent>
-      <mc:AlternateContent xmlns:mc="http://schemas.openxmlformats.org/markup-compatibility/2006">
-        <mc:Choice xmlns:a14="http://schemas.microsoft.com/office/drawing/2010/main" Requires="a14">
+      <mc:AlternateContent xmlns:mc="http://schemas.openxmlformats.org/markup-compatibility/2006" xmlns:a14="http://schemas.microsoft.com/office/drawing/2010/main">
+        <mc:Choice Requires="a14">
           <p:sp>
             <p:nvSpPr>
               <p:cNvPr id="33" name="文本框 32">
@@ -5948,7 +5953,7 @@
             </p:txBody>
           </p:sp>
         </mc:Choice>
-        <mc:Fallback>
+        <mc:Fallback xmlns="">
           <p:sp>
             <p:nvSpPr>
               <p:cNvPr id="33" name="文本框 32">
@@ -5993,8 +5998,8 @@
           </p:sp>
         </mc:Fallback>
       </mc:AlternateContent>
-      <mc:AlternateContent xmlns:mc="http://schemas.openxmlformats.org/markup-compatibility/2006">
-        <mc:Choice xmlns:a14="http://schemas.microsoft.com/office/drawing/2010/main" Requires="a14">
+      <mc:AlternateContent xmlns:mc="http://schemas.openxmlformats.org/markup-compatibility/2006" xmlns:a14="http://schemas.microsoft.com/office/drawing/2010/main">
+        <mc:Choice Requires="a14">
           <p:sp>
             <p:nvSpPr>
               <p:cNvPr id="34" name="文本框 33">
@@ -6091,7 +6096,7 @@
             </p:txBody>
           </p:sp>
         </mc:Choice>
-        <mc:Fallback>
+        <mc:Fallback xmlns="">
           <p:sp>
             <p:nvSpPr>
               <p:cNvPr id="34" name="文本框 33">
@@ -6570,8 +6575,8 @@
           </a:p>
         </p:txBody>
       </p:sp>
-      <mc:AlternateContent xmlns:mc="http://schemas.openxmlformats.org/markup-compatibility/2006">
-        <mc:Choice xmlns:a14="http://schemas.microsoft.com/office/drawing/2010/main" Requires="a14">
+      <mc:AlternateContent xmlns:mc="http://schemas.openxmlformats.org/markup-compatibility/2006" xmlns:a14="http://schemas.microsoft.com/office/drawing/2010/main">
+        <mc:Choice Requires="a14">
           <p:sp>
             <p:nvSpPr>
               <p:cNvPr id="52" name="文本框 51">
@@ -6646,7 +6651,7 @@
             </p:txBody>
           </p:sp>
         </mc:Choice>
-        <mc:Fallback>
+        <mc:Fallback xmlns="">
           <p:sp>
             <p:nvSpPr>
               <p:cNvPr id="52" name="文本框 51">
@@ -6691,8 +6696,8 @@
           </p:sp>
         </mc:Fallback>
       </mc:AlternateContent>
-      <mc:AlternateContent xmlns:mc="http://schemas.openxmlformats.org/markup-compatibility/2006">
-        <mc:Choice xmlns:a14="http://schemas.microsoft.com/office/drawing/2010/main" Requires="a14">
+      <mc:AlternateContent xmlns:mc="http://schemas.openxmlformats.org/markup-compatibility/2006" xmlns:a14="http://schemas.microsoft.com/office/drawing/2010/main">
+        <mc:Choice Requires="a14">
           <p:sp>
             <p:nvSpPr>
               <p:cNvPr id="54" name="文本框 53">
@@ -6781,7 +6786,7 @@
             </p:txBody>
           </p:sp>
         </mc:Choice>
-        <mc:Fallback>
+        <mc:Fallback xmlns="">
           <p:sp>
             <p:nvSpPr>
               <p:cNvPr id="54" name="文本框 53">
@@ -6916,8 +6921,8 @@
           </a:p>
         </p:txBody>
       </p:sp>
-      <mc:AlternateContent xmlns:mc="http://schemas.openxmlformats.org/markup-compatibility/2006">
-        <mc:Choice xmlns:a14="http://schemas.microsoft.com/office/drawing/2010/main" Requires="a14">
+      <mc:AlternateContent xmlns:mc="http://schemas.openxmlformats.org/markup-compatibility/2006" xmlns:a14="http://schemas.microsoft.com/office/drawing/2010/main">
+        <mc:Choice Requires="a14">
           <p:sp>
             <p:nvSpPr>
               <p:cNvPr id="63" name="文本框 62">
@@ -7083,7 +7088,7 @@
             </p:txBody>
           </p:sp>
         </mc:Choice>
-        <mc:Fallback>
+        <mc:Fallback xmlns="">
           <p:sp>
             <p:nvSpPr>
               <p:cNvPr id="63" name="文本框 62">
@@ -7128,8 +7133,8 @@
           </p:sp>
         </mc:Fallback>
       </mc:AlternateContent>
-      <mc:AlternateContent xmlns:mc="http://schemas.openxmlformats.org/markup-compatibility/2006">
-        <mc:Choice xmlns:a14="http://schemas.microsoft.com/office/drawing/2010/main" Requires="a14">
+      <mc:AlternateContent xmlns:mc="http://schemas.openxmlformats.org/markup-compatibility/2006" xmlns:a14="http://schemas.microsoft.com/office/drawing/2010/main">
+        <mc:Choice Requires="a14">
           <p:sp>
             <p:nvSpPr>
               <p:cNvPr id="66" name="文本框 65">
@@ -7206,7 +7211,7 @@
             </p:txBody>
           </p:sp>
         </mc:Choice>
-        <mc:Fallback>
+        <mc:Fallback xmlns="">
           <p:sp>
             <p:nvSpPr>
               <p:cNvPr id="66" name="文本框 65">
@@ -8187,8 +8192,8 @@
           </a:p>
         </p:txBody>
       </p:sp>
-      <mc:AlternateContent xmlns:mc="http://schemas.openxmlformats.org/markup-compatibility/2006">
-        <mc:Choice xmlns:a14="http://schemas.microsoft.com/office/drawing/2010/main" Requires="a14">
+      <mc:AlternateContent xmlns:mc="http://schemas.openxmlformats.org/markup-compatibility/2006" xmlns:a14="http://schemas.microsoft.com/office/drawing/2010/main">
+        <mc:Choice Requires="a14">
           <p:sp>
             <p:nvSpPr>
               <p:cNvPr id="87" name="文本框 86">
@@ -8275,7 +8280,7 @@
             </p:txBody>
           </p:sp>
         </mc:Choice>
-        <mc:Fallback>
+        <mc:Fallback xmlns="">
           <p:sp>
             <p:nvSpPr>
               <p:cNvPr id="87" name="文本框 86">
@@ -8350,6 +8355,7 @@
               </a:bodyPr>
               <a:lstStyle/>
               <a:p>
+                <a:pPr/>
                 <a14:m>
                   <m:oMathPara xmlns:m="http://schemas.openxmlformats.org/officeDocument/2006/math">
                     <m:oMathParaPr>
@@ -8360,7 +8366,7 @@
                         <a:rPr kumimoji="1" lang="en-US" altLang="zh-CN" b="0" i="1" smtClean="0">
                           <a:latin typeface="Cambria Math" panose="02040503050406030204" pitchFamily="18" charset="0"/>
                         </a:rPr>
-                        <m:t>𝜂</m:t>
+                        <m:t>𝜆</m:t>
                       </m:r>
                     </m:oMath>
                   </m:oMathPara>
@@ -8396,7 +8402,7 @@
               <a:blipFill>
                 <a:blip r:embed="rId19"/>
                 <a:stretch>
-                  <a:fillRect b="-10000"/>
+                  <a:fillRect/>
                 </a:stretch>
               </a:blipFill>
             </p:spPr>
@@ -8415,8 +8421,8 @@
           </p:sp>
         </mc:Fallback>
       </mc:AlternateContent>
-      <mc:AlternateContent xmlns:mc="http://schemas.openxmlformats.org/markup-compatibility/2006">
-        <mc:Choice xmlns:a14="http://schemas.microsoft.com/office/drawing/2010/main" Requires="a14">
+      <mc:AlternateContent xmlns:mc="http://schemas.openxmlformats.org/markup-compatibility/2006" xmlns:a14="http://schemas.microsoft.com/office/drawing/2010/main">
+        <mc:Choice Requires="a14">
           <p:sp>
             <p:nvSpPr>
               <p:cNvPr id="89" name="文本框 88">
@@ -8491,7 +8497,7 @@
             </p:txBody>
           </p:sp>
         </mc:Choice>
-        <mc:Fallback>
+        <mc:Fallback xmlns="">
           <p:sp>
             <p:nvSpPr>
               <p:cNvPr id="89" name="文本框 88">
@@ -8536,8 +8542,8 @@
           </p:sp>
         </mc:Fallback>
       </mc:AlternateContent>
-      <mc:AlternateContent xmlns:mc="http://schemas.openxmlformats.org/markup-compatibility/2006">
-        <mc:Choice xmlns:a14="http://schemas.microsoft.com/office/drawing/2010/main" Requires="a14">
+      <mc:AlternateContent xmlns:mc="http://schemas.openxmlformats.org/markup-compatibility/2006" xmlns:a14="http://schemas.microsoft.com/office/drawing/2010/main">
+        <mc:Choice Requires="a14">
           <p:sp>
             <p:nvSpPr>
               <p:cNvPr id="90" name="文本框 89">
@@ -8612,7 +8618,7 @@
             </p:txBody>
           </p:sp>
         </mc:Choice>
-        <mc:Fallback>
+        <mc:Fallback xmlns="">
           <p:sp>
             <p:nvSpPr>
               <p:cNvPr id="90" name="文本框 89">
@@ -8657,8 +8663,8 @@
           </p:sp>
         </mc:Fallback>
       </mc:AlternateContent>
-      <mc:AlternateContent xmlns:mc="http://schemas.openxmlformats.org/markup-compatibility/2006">
-        <mc:Choice xmlns:a14="http://schemas.microsoft.com/office/drawing/2010/main" Requires="a14">
+      <mc:AlternateContent xmlns:mc="http://schemas.openxmlformats.org/markup-compatibility/2006" xmlns:a14="http://schemas.microsoft.com/office/drawing/2010/main">
+        <mc:Choice Requires="a14">
           <p:sp>
             <p:nvSpPr>
               <p:cNvPr id="91" name="文本框 90">
@@ -8746,7 +8752,7 @@
             </p:txBody>
           </p:sp>
         </mc:Choice>
-        <mc:Fallback>
+        <mc:Fallback xmlns="">
           <p:sp>
             <p:nvSpPr>
               <p:cNvPr id="91" name="文本框 90">
@@ -9178,8 +9184,8 @@
           </a:p>
         </p:txBody>
       </p:sp>
-      <mc:AlternateContent xmlns:mc="http://schemas.openxmlformats.org/markup-compatibility/2006">
-        <mc:Choice xmlns:a14="http://schemas.microsoft.com/office/drawing/2010/main" Requires="a14">
+      <mc:AlternateContent xmlns:mc="http://schemas.openxmlformats.org/markup-compatibility/2006" xmlns:a14="http://schemas.microsoft.com/office/drawing/2010/main">
+        <mc:Choice Requires="a14">
           <p:sp>
             <p:nvSpPr>
               <p:cNvPr id="103" name="文本框 102">
@@ -9254,7 +9260,7 @@
             </p:txBody>
           </p:sp>
         </mc:Choice>
-        <mc:Fallback>
+        <mc:Fallback xmlns="">
           <p:sp>
             <p:nvSpPr>
               <p:cNvPr id="103" name="文本框 102">
@@ -9299,8 +9305,8 @@
           </p:sp>
         </mc:Fallback>
       </mc:AlternateContent>
-      <mc:AlternateContent xmlns:mc="http://schemas.openxmlformats.org/markup-compatibility/2006">
-        <mc:Choice xmlns:a14="http://schemas.microsoft.com/office/drawing/2010/main" Requires="a14">
+      <mc:AlternateContent xmlns:mc="http://schemas.openxmlformats.org/markup-compatibility/2006" xmlns:a14="http://schemas.microsoft.com/office/drawing/2010/main">
+        <mc:Choice Requires="a14">
           <p:sp>
             <p:nvSpPr>
               <p:cNvPr id="104" name="文本框 103">
@@ -9375,7 +9381,7 @@
             </p:txBody>
           </p:sp>
         </mc:Choice>
-        <mc:Fallback>
+        <mc:Fallback xmlns="">
           <p:sp>
             <p:nvSpPr>
               <p:cNvPr id="104" name="文本框 103">
@@ -9591,8 +9597,8 @@
           </a:p>
         </p:txBody>
       </p:sp>
-      <mc:AlternateContent xmlns:mc="http://schemas.openxmlformats.org/markup-compatibility/2006">
-        <mc:Choice xmlns:a14="http://schemas.microsoft.com/office/drawing/2010/main" Requires="a14">
+      <mc:AlternateContent xmlns:mc="http://schemas.openxmlformats.org/markup-compatibility/2006" xmlns:a14="http://schemas.microsoft.com/office/drawing/2010/main">
+        <mc:Choice Requires="a14">
           <p:sp>
             <p:nvSpPr>
               <p:cNvPr id="108" name="文本框 107">
@@ -9667,7 +9673,7 @@
             </p:txBody>
           </p:sp>
         </mc:Choice>
-        <mc:Fallback>
+        <mc:Fallback xmlns="">
           <p:sp>
             <p:nvSpPr>
               <p:cNvPr id="108" name="文本框 107">
@@ -9712,8 +9718,8 @@
           </p:sp>
         </mc:Fallback>
       </mc:AlternateContent>
-      <mc:AlternateContent xmlns:mc="http://schemas.openxmlformats.org/markup-compatibility/2006">
-        <mc:Choice xmlns:a14="http://schemas.microsoft.com/office/drawing/2010/main" Requires="a14">
+      <mc:AlternateContent xmlns:mc="http://schemas.openxmlformats.org/markup-compatibility/2006" xmlns:a14="http://schemas.microsoft.com/office/drawing/2010/main">
+        <mc:Choice Requires="a14">
           <p:sp>
             <p:nvSpPr>
               <p:cNvPr id="109" name="文本框 108">
@@ -9788,7 +9794,7 @@
             </p:txBody>
           </p:sp>
         </mc:Choice>
-        <mc:Fallback>
+        <mc:Fallback xmlns="">
           <p:sp>
             <p:nvSpPr>
               <p:cNvPr id="109" name="文本框 108">
@@ -9887,8 +9893,8 @@
           </a:p>
         </p:txBody>
       </p:sp>
-      <mc:AlternateContent xmlns:mc="http://schemas.openxmlformats.org/markup-compatibility/2006">
-        <mc:Choice xmlns:a14="http://schemas.microsoft.com/office/drawing/2010/main" Requires="a14">
+      <mc:AlternateContent xmlns:mc="http://schemas.openxmlformats.org/markup-compatibility/2006" xmlns:a14="http://schemas.microsoft.com/office/drawing/2010/main">
+        <mc:Choice Requires="a14">
           <p:sp>
             <p:nvSpPr>
               <p:cNvPr id="111" name="文本框 110">
@@ -9963,7 +9969,7 @@
             </p:txBody>
           </p:sp>
         </mc:Choice>
-        <mc:Fallback>
+        <mc:Fallback xmlns="">
           <p:sp>
             <p:nvSpPr>
               <p:cNvPr id="111" name="文本框 110">
@@ -10008,8 +10014,8 @@
           </p:sp>
         </mc:Fallback>
       </mc:AlternateContent>
-      <mc:AlternateContent xmlns:mc="http://schemas.openxmlformats.org/markup-compatibility/2006">
-        <mc:Choice xmlns:a14="http://schemas.microsoft.com/office/drawing/2010/main" Requires="a14">
+      <mc:AlternateContent xmlns:mc="http://schemas.openxmlformats.org/markup-compatibility/2006" xmlns:a14="http://schemas.microsoft.com/office/drawing/2010/main">
+        <mc:Choice Requires="a14">
           <p:sp>
             <p:nvSpPr>
               <p:cNvPr id="112" name="文本框 111">
@@ -10084,7 +10090,7 @@
             </p:txBody>
           </p:sp>
         </mc:Choice>
-        <mc:Fallback>
+        <mc:Fallback xmlns="">
           <p:sp>
             <p:nvSpPr>
               <p:cNvPr id="112" name="文本框 111">
@@ -10443,8 +10449,8 @@
           </a:p>
         </p:txBody>
       </p:sp>
-      <mc:AlternateContent xmlns:mc="http://schemas.openxmlformats.org/markup-compatibility/2006">
-        <mc:Choice xmlns:a14="http://schemas.microsoft.com/office/drawing/2010/main" Requires="a14">
+      <mc:AlternateContent xmlns:mc="http://schemas.openxmlformats.org/markup-compatibility/2006" xmlns:a14="http://schemas.microsoft.com/office/drawing/2010/main">
+        <mc:Choice Requires="a14">
           <p:sp>
             <p:nvSpPr>
               <p:cNvPr id="124" name="文本框 123">
@@ -10509,7 +10515,7 @@
             </p:txBody>
           </p:sp>
         </mc:Choice>
-        <mc:Fallback>
+        <mc:Fallback xmlns="">
           <p:sp>
             <p:nvSpPr>
               <p:cNvPr id="124" name="文本框 123">
@@ -10931,8 +10937,8 @@
           </a:prstGeom>
         </p:spPr>
       </p:pic>
-      <mc:AlternateContent xmlns:mc="http://schemas.openxmlformats.org/markup-compatibility/2006">
-        <mc:Choice xmlns:a14="http://schemas.microsoft.com/office/drawing/2010/main" Requires="a14">
+      <mc:AlternateContent xmlns:mc="http://schemas.openxmlformats.org/markup-compatibility/2006" xmlns:a14="http://schemas.microsoft.com/office/drawing/2010/main">
+        <mc:Choice Requires="a14">
           <p:sp>
             <p:nvSpPr>
               <p:cNvPr id="131" name="文本框 130">
@@ -11044,7 +11050,7 @@
             </p:txBody>
           </p:sp>
         </mc:Choice>
-        <mc:Fallback>
+        <mc:Fallback xmlns="">
           <p:sp>
             <p:nvSpPr>
               <p:cNvPr id="131" name="文本框 130">
@@ -11492,8 +11498,8 @@
           </a:p>
         </p:txBody>
       </p:sp>
-      <mc:AlternateContent xmlns:mc="http://schemas.openxmlformats.org/markup-compatibility/2006">
-        <mc:Choice xmlns:a14="http://schemas.microsoft.com/office/drawing/2010/main" Requires="a14">
+      <mc:AlternateContent xmlns:mc="http://schemas.openxmlformats.org/markup-compatibility/2006" xmlns:a14="http://schemas.microsoft.com/office/drawing/2010/main">
+        <mc:Choice Requires="a14">
           <p:sp>
             <p:nvSpPr>
               <p:cNvPr id="167" name="文本框 166">
@@ -11558,7 +11564,7 @@
             </p:txBody>
           </p:sp>
         </mc:Choice>
-        <mc:Fallback>
+        <mc:Fallback xmlns="">
           <p:sp>
             <p:nvSpPr>
               <p:cNvPr id="167" name="文本框 166">
@@ -11974,8 +11980,8 @@
           </a:p>
         </p:txBody>
       </p:sp>
-      <mc:AlternateContent xmlns:mc="http://schemas.openxmlformats.org/markup-compatibility/2006">
-        <mc:Choice xmlns:a14="http://schemas.microsoft.com/office/drawing/2010/main" Requires="a14">
+      <mc:AlternateContent xmlns:mc="http://schemas.openxmlformats.org/markup-compatibility/2006" xmlns:a14="http://schemas.microsoft.com/office/drawing/2010/main">
+        <mc:Choice Requires="a14">
           <p:sp>
             <p:nvSpPr>
               <p:cNvPr id="175" name="文本框 174">
@@ -12062,7 +12068,7 @@
             </p:txBody>
           </p:sp>
         </mc:Choice>
-        <mc:Fallback>
+        <mc:Fallback xmlns="">
           <p:sp>
             <p:nvSpPr>
               <p:cNvPr id="175" name="文本框 174">
@@ -12107,8 +12113,8 @@
           </p:sp>
         </mc:Fallback>
       </mc:AlternateContent>
-      <mc:AlternateContent xmlns:mc="http://schemas.openxmlformats.org/markup-compatibility/2006">
-        <mc:Choice xmlns:a14="http://schemas.microsoft.com/office/drawing/2010/main" Requires="a14">
+      <mc:AlternateContent xmlns:mc="http://schemas.openxmlformats.org/markup-compatibility/2006" xmlns:a14="http://schemas.microsoft.com/office/drawing/2010/main">
+        <mc:Choice Requires="a14">
           <p:sp>
             <p:nvSpPr>
               <p:cNvPr id="176" name="文本框 175">
@@ -12195,7 +12201,7 @@
             </p:txBody>
           </p:sp>
         </mc:Choice>
-        <mc:Fallback>
+        <mc:Fallback xmlns="">
           <p:sp>
             <p:nvSpPr>
               <p:cNvPr id="176" name="文本框 175">
@@ -12240,8 +12246,8 @@
           </p:sp>
         </mc:Fallback>
       </mc:AlternateContent>
-      <mc:AlternateContent xmlns:mc="http://schemas.openxmlformats.org/markup-compatibility/2006">
-        <mc:Choice xmlns:a14="http://schemas.microsoft.com/office/drawing/2010/main" Requires="a14">
+      <mc:AlternateContent xmlns:mc="http://schemas.openxmlformats.org/markup-compatibility/2006" xmlns:a14="http://schemas.microsoft.com/office/drawing/2010/main">
+        <mc:Choice Requires="a14">
           <p:sp>
             <p:nvSpPr>
               <p:cNvPr id="177" name="文本框 176">
@@ -12317,7 +12323,7 @@
             </p:txBody>
           </p:sp>
         </mc:Choice>
-        <mc:Fallback>
+        <mc:Fallback xmlns="">
           <p:sp>
             <p:nvSpPr>
               <p:cNvPr id="177" name="文本框 176">
@@ -12362,8 +12368,8 @@
           </p:sp>
         </mc:Fallback>
       </mc:AlternateContent>
-      <mc:AlternateContent xmlns:mc="http://schemas.openxmlformats.org/markup-compatibility/2006">
-        <mc:Choice xmlns:a14="http://schemas.microsoft.com/office/drawing/2010/main" Requires="a14">
+      <mc:AlternateContent xmlns:mc="http://schemas.openxmlformats.org/markup-compatibility/2006" xmlns:a14="http://schemas.microsoft.com/office/drawing/2010/main">
+        <mc:Choice Requires="a14">
           <p:sp>
             <p:nvSpPr>
               <p:cNvPr id="178" name="文本框 177">
@@ -12428,7 +12434,7 @@
             </p:txBody>
           </p:sp>
         </mc:Choice>
-        <mc:Fallback>
+        <mc:Fallback xmlns="">
           <p:sp>
             <p:nvSpPr>
               <p:cNvPr id="178" name="文本框 177">
@@ -12733,8 +12739,8 @@
           </a:fontRef>
         </p:style>
       </p:cxnSp>
-      <mc:AlternateContent xmlns:mc="http://schemas.openxmlformats.org/markup-compatibility/2006">
-        <mc:Choice xmlns:a14="http://schemas.microsoft.com/office/drawing/2010/main" Requires="a14">
+      <mc:AlternateContent xmlns:mc="http://schemas.openxmlformats.org/markup-compatibility/2006" xmlns:a14="http://schemas.microsoft.com/office/drawing/2010/main">
+        <mc:Choice Requires="a14">
           <p:sp>
             <p:nvSpPr>
               <p:cNvPr id="184" name="文本框 183">
@@ -12868,7 +12874,7 @@
             </p:txBody>
           </p:sp>
         </mc:Choice>
-        <mc:Fallback>
+        <mc:Fallback xmlns="">
           <p:sp>
             <p:nvSpPr>
               <p:cNvPr id="184" name="文本框 183">
@@ -13569,8 +13575,8 @@
           </a:p>
         </p:txBody>
       </p:sp>
-      <mc:AlternateContent xmlns:mc="http://schemas.openxmlformats.org/markup-compatibility/2006">
-        <mc:Choice xmlns:a14="http://schemas.microsoft.com/office/drawing/2010/main" Requires="a14">
+      <mc:AlternateContent xmlns:mc="http://schemas.openxmlformats.org/markup-compatibility/2006" xmlns:a14="http://schemas.microsoft.com/office/drawing/2010/main">
+        <mc:Choice Requires="a14">
           <p:sp>
             <p:nvSpPr>
               <p:cNvPr id="217" name="文本框 216">
@@ -13645,7 +13651,7 @@
             </p:txBody>
           </p:sp>
         </mc:Choice>
-        <mc:Fallback>
+        <mc:Fallback xmlns="">
           <p:sp>
             <p:nvSpPr>
               <p:cNvPr id="217" name="文本框 216">
@@ -13690,8 +13696,8 @@
           </p:sp>
         </mc:Fallback>
       </mc:AlternateContent>
-      <mc:AlternateContent xmlns:mc="http://schemas.openxmlformats.org/markup-compatibility/2006">
-        <mc:Choice xmlns:a14="http://schemas.microsoft.com/office/drawing/2010/main" Requires="a14">
+      <mc:AlternateContent xmlns:mc="http://schemas.openxmlformats.org/markup-compatibility/2006" xmlns:a14="http://schemas.microsoft.com/office/drawing/2010/main">
+        <mc:Choice Requires="a14">
           <p:sp>
             <p:nvSpPr>
               <p:cNvPr id="218" name="文本框 217">
@@ -13780,7 +13786,7 @@
             </p:txBody>
           </p:sp>
         </mc:Choice>
-        <mc:Fallback>
+        <mc:Fallback xmlns="">
           <p:sp>
             <p:nvSpPr>
               <p:cNvPr id="218" name="文本框 217">
@@ -13825,8 +13831,8 @@
           </p:sp>
         </mc:Fallback>
       </mc:AlternateContent>
-      <mc:AlternateContent xmlns:mc="http://schemas.openxmlformats.org/markup-compatibility/2006">
-        <mc:Choice xmlns:a14="http://schemas.microsoft.com/office/drawing/2010/main" Requires="a14">
+      <mc:AlternateContent xmlns:mc="http://schemas.openxmlformats.org/markup-compatibility/2006" xmlns:a14="http://schemas.microsoft.com/office/drawing/2010/main">
+        <mc:Choice Requires="a14">
           <p:sp>
             <p:nvSpPr>
               <p:cNvPr id="219" name="文本框 218">
@@ -13901,7 +13907,7 @@
             </p:txBody>
           </p:sp>
         </mc:Choice>
-        <mc:Fallback>
+        <mc:Fallback xmlns="">
           <p:sp>
             <p:nvSpPr>
               <p:cNvPr id="219" name="文本框 218">
@@ -13946,8 +13952,8 @@
           </p:sp>
         </mc:Fallback>
       </mc:AlternateContent>
-      <mc:AlternateContent xmlns:mc="http://schemas.openxmlformats.org/markup-compatibility/2006">
-        <mc:Choice xmlns:a14="http://schemas.microsoft.com/office/drawing/2010/main" Requires="a14">
+      <mc:AlternateContent xmlns:mc="http://schemas.openxmlformats.org/markup-compatibility/2006" xmlns:a14="http://schemas.microsoft.com/office/drawing/2010/main">
+        <mc:Choice Requires="a14">
           <p:sp>
             <p:nvSpPr>
               <p:cNvPr id="220" name="文本框 219">
@@ -14022,7 +14028,7 @@
             </p:txBody>
           </p:sp>
         </mc:Choice>
-        <mc:Fallback>
+        <mc:Fallback xmlns="">
           <p:sp>
             <p:nvSpPr>
               <p:cNvPr id="220" name="文本框 219">
@@ -14067,8 +14073,8 @@
           </p:sp>
         </mc:Fallback>
       </mc:AlternateContent>
-      <mc:AlternateContent xmlns:mc="http://schemas.openxmlformats.org/markup-compatibility/2006">
-        <mc:Choice xmlns:a14="http://schemas.microsoft.com/office/drawing/2010/main" Requires="a14">
+      <mc:AlternateContent xmlns:mc="http://schemas.openxmlformats.org/markup-compatibility/2006" xmlns:a14="http://schemas.microsoft.com/office/drawing/2010/main">
+        <mc:Choice Requires="a14">
           <p:sp>
             <p:nvSpPr>
               <p:cNvPr id="221" name="文本框 220">
@@ -14143,7 +14149,7 @@
             </p:txBody>
           </p:sp>
         </mc:Choice>
-        <mc:Fallback>
+        <mc:Fallback xmlns="">
           <p:sp>
             <p:nvSpPr>
               <p:cNvPr id="221" name="文本框 220">
@@ -14497,8 +14503,8 @@
           </a:p>
         </p:txBody>
       </p:sp>
-      <mc:AlternateContent xmlns:mc="http://schemas.openxmlformats.org/markup-compatibility/2006">
-        <mc:Choice xmlns:a14="http://schemas.microsoft.com/office/drawing/2010/main" Requires="a14">
+      <mc:AlternateContent xmlns:mc="http://schemas.openxmlformats.org/markup-compatibility/2006" xmlns:a14="http://schemas.microsoft.com/office/drawing/2010/main">
+        <mc:Choice Requires="a14">
           <p:sp>
             <p:nvSpPr>
               <p:cNvPr id="228" name="文本框 227">
@@ -14586,7 +14592,7 @@
             </p:txBody>
           </p:sp>
         </mc:Choice>
-        <mc:Fallback>
+        <mc:Fallback xmlns="">
           <p:sp>
             <p:nvSpPr>
               <p:cNvPr id="228" name="文本框 227">
